--- a/MECH191_metallurgy/slideDecks/pptx/MECH191_Week4_Lecture.pptx
+++ b/MECH191_metallurgy/slideDecks/pptx/MECH191_Week4_Lecture.pptx
@@ -24573,7 +24573,7 @@
         </p:spPr>
         <p:txBody>
           <a:bodyPr wrap="none" lIns="0" rIns="0" tIns="0" bIns="0">
-            <a:spAutoFit/>
+            <a:noAutofit/>
           </a:bodyPr>
           <a:lstStyle/>
           <a:p>
@@ -24584,7 +24584,7 @@
                 </a:solidFill>
                 <a:latin typeface="Calibri"/>
               </a:rPr>
-              <a:t>Metallography Lab — Module 3</a:t>
+              <a:t>Alloy Research Portfolio — Module 3</a:t>
             </a:r>
           </a:p>
         </p:txBody>
@@ -24607,7 +24607,7 @@
         </p:spPr>
         <p:txBody>
           <a:bodyPr wrap="none" lIns="0" rIns="0" tIns="0" bIns="0">
-            <a:spAutoFit/>
+            <a:noAutofit/>
           </a:bodyPr>
           <a:lstStyle/>
           <a:p>
@@ -24618,7 +24618,7 @@
                 </a:solidFill>
                 <a:latin typeface="Calibri"/>
               </a:rPr>
-              <a:t>EXAMET-5-R-600-HD  ·  50–500×</a:t>
+              <a:t>No Microscope Required</a:t>
             </a:r>
           </a:p>
         </p:txBody>
@@ -24743,7 +24743,7 @@
         </p:spPr>
         <p:txBody>
           <a:bodyPr wrap="none" lIns="0" rIns="0" tIns="0" bIns="0">
-            <a:spAutoFit/>
+            <a:noAutofit/>
           </a:bodyPr>
           <a:lstStyle/>
           <a:p>
@@ -24754,7 +24754,7 @@
                 </a:solidFill>
                 <a:latin typeface="Calibri"/>
               </a:rPr>
-              <a:t>Compare pearlite fraction across three carbon levels. Sketch pearlite </a:t>
+              <a:t>Research 1018, 1045, and 1075 steel: composition and published hardness</a:t>
             </a:r>
           </a:p>
         </p:txBody>
@@ -24777,7 +24777,7 @@
         </p:spPr>
         <p:txBody>
           <a:bodyPr wrap="none" lIns="0" rIns="0" tIns="0" bIns="0">
-            <a:spAutoFit/>
+            <a:noAutofit/>
           </a:bodyPr>
           <a:lstStyle/>
           <a:p>
@@ -24788,7 +24788,7 @@
                 </a:solidFill>
                 <a:latin typeface="Calibri"/>
               </a:rPr>
-              <a:t>lamellae from each specimen at 500×.</a:t>
+              <a:t>across the carbon range, then apply the lever rule.</a:t>
             </a:r>
           </a:p>
         </p:txBody>
@@ -24845,7 +24845,7 @@
         </p:spPr>
         <p:txBody>
           <a:bodyPr wrap="none" lIns="0" rIns="0" tIns="0" bIns="0">
-            <a:spAutoFit/>
+            <a:noAutofit/>
           </a:bodyPr>
           <a:lstStyle/>
           <a:p>
@@ -24856,7 +24856,7 @@
                 </a:solidFill>
                 <a:latin typeface="Calibri"/>
               </a:rPr>
-              <a:t>1  Observe — complete feature table</a:t>
+              <a:t>1  Research — record data &amp; sources</a:t>
             </a:r>
           </a:p>
         </p:txBody>
@@ -24879,7 +24879,7 @@
         </p:spPr>
         <p:txBody>
           <a:bodyPr wrap="none" lIns="0" rIns="0" tIns="0" bIns="0">
-            <a:spAutoFit/>
+            <a:noAutofit/>
           </a:bodyPr>
           <a:lstStyle/>
           <a:p>
@@ -24890,7 +24890,7 @@
                 </a:solidFill>
                 <a:latin typeface="Calibri"/>
               </a:rPr>
-              <a:t>2  Sketch — label magnification &amp; specimen</a:t>
+              <a:t>2  Answer — short-answer questions</a:t>
             </a:r>
           </a:p>
         </p:txBody>
@@ -24913,7 +24913,7 @@
         </p:spPr>
         <p:txBody>
           <a:bodyPr wrap="none" lIns="0" rIns="0" tIns="0" bIns="0">
-            <a:spAutoFit/>
+            <a:noAutofit/>
           </a:bodyPr>
           <a:lstStyle/>
           <a:p>
@@ -24924,7 +24924,7 @@
                 </a:solidFill>
                 <a:latin typeface="Calibri"/>
               </a:rPr>
-              <a:t>3  Answer — 4 short questions</a:t>
+              <a:t>3  Apply — critical-thinking &amp; equations</a:t>
             </a:r>
           </a:p>
         </p:txBody>
@@ -24947,7 +24947,7 @@
         </p:spPr>
         <p:txBody>
           <a:bodyPr wrap="none" lIns="0" rIns="0" tIns="0" bIns="0">
-            <a:spAutoFit/>
+            <a:noAutofit/>
           </a:bodyPr>
           <a:lstStyle/>
           <a:p>
@@ -24958,7 +24958,7 @@
                 </a:solidFill>
                 <a:latin typeface="Calibri"/>
               </a:rPr>
-              <a:t>Specimens to Check Out</a:t>
+              <a:t>Alloys of Record</a:t>
             </a:r>
           </a:p>
         </p:txBody>
@@ -24981,7 +24981,7 @@
         </p:spPr>
         <p:txBody>
           <a:bodyPr wrap="none" lIns="0" rIns="0" tIns="0" bIns="0">
-            <a:spAutoFit/>
+            <a:noAutofit/>
           </a:bodyPr>
           <a:lstStyle/>
           <a:p>
@@ -24992,7 +24992,7 @@
                 </a:solidFill>
                 <a:latin typeface="Calibri"/>
               </a:rPr>
-              <a:t>· Specimen A — 1018 steel</a:t>
+              <a:t>· Alloy A — 1018 steel</a:t>
             </a:r>
           </a:p>
         </p:txBody>
@@ -25015,7 +25015,7 @@
         </p:spPr>
         <p:txBody>
           <a:bodyPr wrap="none" lIns="0" rIns="0" tIns="0" bIns="0">
-            <a:spAutoFit/>
+            <a:noAutofit/>
           </a:bodyPr>
           <a:lstStyle/>
           <a:p>
@@ -25026,7 +25026,7 @@
                 </a:solidFill>
                 <a:latin typeface="Calibri"/>
               </a:rPr>
-              <a:t>· Specimen B — 1045 steel</a:t>
+              <a:t>· Alloy B — 1045 steel</a:t>
             </a:r>
           </a:p>
         </p:txBody>
@@ -25049,7 +25049,7 @@
         </p:spPr>
         <p:txBody>
           <a:bodyPr wrap="none" lIns="0" rIns="0" tIns="0" bIns="0">
-            <a:spAutoFit/>
+            <a:noAutofit/>
           </a:bodyPr>
           <a:lstStyle/>
           <a:p>
@@ -25060,7 +25060,7 @@
                 </a:solidFill>
                 <a:latin typeface="Calibri"/>
               </a:rPr>
-              <a:t>· Specimen C — 1075 steel</a:t>
+              <a:t>· Alloy C — 1075 steel</a:t>
             </a:r>
           </a:p>
         </p:txBody>
@@ -25083,7 +25083,7 @@
         </p:spPr>
         <p:txBody>
           <a:bodyPr wrap="none" lIns="0" rIns="0" tIns="0" bIns="0">
-            <a:spAutoFit/>
+            <a:noAutofit/>
           </a:bodyPr>
           <a:lstStyle/>
           <a:p>
@@ -25094,7 +25094,7 @@
                 </a:solidFill>
                 <a:latin typeface="Calibri"/>
               </a:rPr>
-              <a:t>How to check out the kit:</a:t>
+              <a:t>How to Complete This Module:</a:t>
             </a:r>
           </a:p>
         </p:txBody>
@@ -25117,7 +25117,7 @@
         </p:spPr>
         <p:txBody>
           <a:bodyPr wrap="none" lIns="0" rIns="0" tIns="0" bIns="0">
-            <a:spAutoFit/>
+            <a:noAutofit/>
           </a:bodyPr>
           <a:lstStyle/>
           <a:p>
@@ -25128,7 +25128,7 @@
                 </a:solidFill>
                 <a:latin typeface="Calibri"/>
               </a:rPr>
-              <a:t>1  See instructor after class today</a:t>
+              <a:t>1  Research the alloy(s) using credible sources</a:t>
             </a:r>
           </a:p>
         </p:txBody>
@@ -25151,7 +25151,7 @@
         </p:spPr>
         <p:txBody>
           <a:bodyPr wrap="none" lIns="0" rIns="0" tIns="0" bIns="0">
-            <a:spAutoFit/>
+            <a:noAutofit/>
           </a:bodyPr>
           <a:lstStyle/>
           <a:p>
@@ -25162,7 +25162,7 @@
                 </a:solidFill>
                 <a:latin typeface="Calibri"/>
               </a:rPr>
-              <a:t>2  Sign out the specimen tray</a:t>
+              <a:t>2  Record data with a source citation</a:t>
             </a:r>
           </a:p>
         </p:txBody>
@@ -25185,7 +25185,7 @@
         </p:spPr>
         <p:txBody>
           <a:bodyPr wrap="none" lIns="0" rIns="0" tIns="0" bIns="0">
-            <a:spAutoFit/>
+            <a:noAutofit/>
           </a:bodyPr>
           <a:lstStyle/>
           <a:p>
@@ -25196,7 +25196,7 @@
                 </a:solidFill>
                 <a:latin typeface="Calibri"/>
               </a:rPr>
-              <a:t>3  Use the EXAMET-5 at your convenience</a:t>
+              <a:t>3  Answer the short-answer questions</a:t>
             </a:r>
           </a:p>
         </p:txBody>
@@ -25219,7 +25219,7 @@
         </p:spPr>
         <p:txBody>
           <a:bodyPr wrap="none" lIns="0" rIns="0" tIns="0" bIns="0">
-            <a:spAutoFit/>
+            <a:noAutofit/>
           </a:bodyPr>
           <a:lstStyle/>
           <a:p>
@@ -25230,7 +25230,7 @@
                 </a:solidFill>
                 <a:latin typeface="Calibri"/>
               </a:rPr>
-              <a:t>4  Return kit before leaving class</a:t>
+              <a:t>4  Answer the critical-thinking questions</a:t>
             </a:r>
           </a:p>
         </p:txBody>
@@ -25253,7 +25253,7 @@
         </p:spPr>
         <p:txBody>
           <a:bodyPr wrap="none" lIns="0" rIns="0" tIns="0" bIns="0">
-            <a:spAutoFit/>
+            <a:noAutofit/>
           </a:bodyPr>
           <a:lstStyle/>
           <a:p>
@@ -25264,7 +25264,7 @@
                 </a:solidFill>
                 <a:latin typeface="Calibri"/>
               </a:rPr>
-              <a:t>5  Submit completed module with your portfolio</a:t>
+              <a:t>5  Keep the module with your portfolio</a:t>
             </a:r>
           </a:p>
         </p:txBody>
